--- a/ゲーム科3年/00_前期/オンラインゲームプログラミングⅠ/07_パケット.pptx
+++ b/ゲーム科3年/00_前期/オンラインゲームプログラミングⅠ/07_パケット.pptx
@@ -7,6 +7,9 @@
   <p:sldIdLst>
     <p:sldId id="256" r:id="rId2"/>
     <p:sldId id="257" r:id="rId3"/>
+    <p:sldId id="258" r:id="rId4"/>
+    <p:sldId id="259" r:id="rId5"/>
+    <p:sldId id="260" r:id="rId6"/>
   </p:sldIdLst>
   <p:sldSz cx="12192000" cy="6858000"/>
   <p:notesSz cx="6858000" cy="9144000"/>
@@ -3990,6 +3993,785 @@
 </p:sld>
 </file>
 
+<file path=ppt/slides/slide3.xml><?xml version="1.0" encoding="utf-8"?>
+<p:sld xmlns:a="http://schemas.openxmlformats.org/drawingml/2006/main" xmlns:r="http://schemas.openxmlformats.org/officeDocument/2006/relationships" xmlns:p="http://schemas.openxmlformats.org/presentationml/2006/main">
+  <p:cSld>
+    <p:spTree>
+      <p:nvGrpSpPr>
+        <p:cNvPr id="1" name=""/>
+        <p:cNvGrpSpPr/>
+        <p:nvPr/>
+      </p:nvGrpSpPr>
+      <p:grpSpPr>
+        <a:xfrm>
+          <a:off x="0" y="0"/>
+          <a:ext cx="0" cy="0"/>
+          <a:chOff x="0" y="0"/>
+          <a:chExt cx="0" cy="0"/>
+        </a:xfrm>
+      </p:grpSpPr>
+      <p:sp>
+        <p:nvSpPr>
+          <p:cNvPr id="4" name="テキスト ボックス 3">
+            <a:extLst>
+              <a:ext uri="{FF2B5EF4-FFF2-40B4-BE49-F238E27FC236}">
+                <a16:creationId xmlns:a16="http://schemas.microsoft.com/office/drawing/2014/main" id="{5A13BF46-B8C5-48AA-8308-C9ECFF431A18}"/>
+              </a:ext>
+            </a:extLst>
+          </p:cNvPr>
+          <p:cNvSpPr txBox="1"/>
+          <p:nvPr/>
+        </p:nvSpPr>
+        <p:spPr>
+          <a:xfrm>
+            <a:off x="567542" y="491954"/>
+            <a:ext cx="1826141" cy="584775"/>
+          </a:xfrm>
+          <a:prstGeom prst="rect">
+            <a:avLst/>
+          </a:prstGeom>
+          <a:noFill/>
+        </p:spPr>
+        <p:txBody>
+          <a:bodyPr wrap="none" rtlCol="0">
+            <a:spAutoFit/>
+          </a:bodyPr>
+          <a:lstStyle/>
+          <a:p>
+            <a:r>
+              <a:rPr kumimoji="1" lang="ja-JP" altLang="en-US" sz="3200" b="1" u="sng" dirty="0"/>
+              <a:t>パケット</a:t>
+            </a:r>
+          </a:p>
+        </p:txBody>
+      </p:sp>
+      <p:sp>
+        <p:nvSpPr>
+          <p:cNvPr id="6" name="テキスト ボックス 5">
+            <a:extLst>
+              <a:ext uri="{FF2B5EF4-FFF2-40B4-BE49-F238E27FC236}">
+                <a16:creationId xmlns:a16="http://schemas.microsoft.com/office/drawing/2014/main" id="{55830AD6-028B-4C4E-80BF-B70DFC1C3A46}"/>
+              </a:ext>
+            </a:extLst>
+          </p:cNvPr>
+          <p:cNvSpPr txBox="1"/>
+          <p:nvPr/>
+        </p:nvSpPr>
+        <p:spPr>
+          <a:xfrm>
+            <a:off x="567542" y="1216429"/>
+            <a:ext cx="9725739" cy="830997"/>
+          </a:xfrm>
+          <a:prstGeom prst="rect">
+            <a:avLst/>
+          </a:prstGeom>
+          <a:noFill/>
+        </p:spPr>
+        <p:txBody>
+          <a:bodyPr wrap="none" rtlCol="0">
+            <a:spAutoFit/>
+          </a:bodyPr>
+          <a:lstStyle/>
+          <a:p>
+            <a:r>
+              <a:rPr kumimoji="1" lang="ja-JP" altLang="en-US" sz="2400" dirty="0"/>
+              <a:t>そのため、</a:t>
+            </a:r>
+            <a:r>
+              <a:rPr kumimoji="1" lang="ja-JP" altLang="en-US" sz="2400" b="1" dirty="0">
+                <a:solidFill>
+                  <a:srgbClr val="FF0000"/>
+                </a:solidFill>
+              </a:rPr>
+              <a:t>データの頭に何のデータなのかをくっつけて送信</a:t>
+            </a:r>
+            <a:r>
+              <a:rPr kumimoji="1" lang="ja-JP" altLang="en-US" sz="2400" dirty="0"/>
+              <a:t>します。</a:t>
+            </a:r>
+            <a:endParaRPr kumimoji="1" lang="en-US" altLang="ja-JP" sz="2400" dirty="0"/>
+          </a:p>
+          <a:p>
+            <a:r>
+              <a:rPr lang="ja-JP" altLang="en-US" sz="2400" dirty="0"/>
+              <a:t>このデータは</a:t>
+            </a:r>
+            <a:r>
+              <a:rPr lang="ja-JP" altLang="en-US" sz="2400" b="1" dirty="0">
+                <a:solidFill>
+                  <a:srgbClr val="FF0000"/>
+                </a:solidFill>
+              </a:rPr>
+              <a:t>パケットヘッダー</a:t>
+            </a:r>
+            <a:r>
+              <a:rPr lang="ja-JP" altLang="en-US" sz="2400" dirty="0"/>
+              <a:t>と呼ばれています。</a:t>
+            </a:r>
+            <a:endParaRPr kumimoji="1" lang="en-US" altLang="ja-JP" sz="2400" dirty="0"/>
+          </a:p>
+        </p:txBody>
+      </p:sp>
+      <p:grpSp>
+        <p:nvGrpSpPr>
+          <p:cNvPr id="10" name="グループ化 9">
+            <a:extLst>
+              <a:ext uri="{FF2B5EF4-FFF2-40B4-BE49-F238E27FC236}">
+                <a16:creationId xmlns:a16="http://schemas.microsoft.com/office/drawing/2014/main" id="{7501C0C7-CD97-4E01-B8A4-A39B76571FC2}"/>
+              </a:ext>
+            </a:extLst>
+          </p:cNvPr>
+          <p:cNvGrpSpPr/>
+          <p:nvPr/>
+        </p:nvGrpSpPr>
+        <p:grpSpPr>
+          <a:xfrm>
+            <a:off x="761999" y="2675464"/>
+            <a:ext cx="3166534" cy="3454403"/>
+            <a:chOff x="1363133" y="3539064"/>
+            <a:chExt cx="1759129" cy="1921935"/>
+          </a:xfrm>
+        </p:grpSpPr>
+        <p:sp>
+          <p:nvSpPr>
+            <p:cNvPr id="2" name="正方形/長方形 1">
+              <a:extLst>
+                <a:ext uri="{FF2B5EF4-FFF2-40B4-BE49-F238E27FC236}">
+                  <a16:creationId xmlns:a16="http://schemas.microsoft.com/office/drawing/2014/main" id="{4F224484-9179-4BAA-A872-3F785FA18CC9}"/>
+                </a:ext>
+              </a:extLst>
+            </p:cNvPr>
+            <p:cNvSpPr/>
+            <p:nvPr/>
+          </p:nvSpPr>
+          <p:spPr>
+            <a:xfrm>
+              <a:off x="1363133" y="4258732"/>
+              <a:ext cx="1126067" cy="1202267"/>
+            </a:xfrm>
+            <a:prstGeom prst="rect">
+              <a:avLst/>
+            </a:prstGeom>
+          </p:spPr>
+          <p:style>
+            <a:lnRef idx="2">
+              <a:schemeClr val="accent1">
+                <a:shade val="50000"/>
+              </a:schemeClr>
+            </a:lnRef>
+            <a:fillRef idx="1">
+              <a:schemeClr val="accent1"/>
+            </a:fillRef>
+            <a:effectRef idx="0">
+              <a:schemeClr val="accent1"/>
+            </a:effectRef>
+            <a:fontRef idx="minor">
+              <a:schemeClr val="lt1"/>
+            </a:fontRef>
+          </p:style>
+          <p:txBody>
+            <a:bodyPr rtlCol="0" anchor="ctr"/>
+            <a:lstStyle/>
+            <a:p>
+              <a:pPr algn="ctr"/>
+              <a:r>
+                <a:rPr kumimoji="1" lang="en-US" altLang="ja-JP" b="1" dirty="0"/>
+                <a:t>X</a:t>
+              </a:r>
+              <a:r>
+                <a:rPr kumimoji="1" lang="ja-JP" altLang="en-US" b="1" dirty="0"/>
+                <a:t>座標</a:t>
+              </a:r>
+              <a:endParaRPr kumimoji="1" lang="en-US" altLang="ja-JP" b="1" dirty="0"/>
+            </a:p>
+            <a:p>
+              <a:pPr algn="ctr"/>
+              <a:r>
+                <a:rPr lang="en-US" altLang="ja-JP" b="1" dirty="0"/>
+                <a:t>Y</a:t>
+              </a:r>
+              <a:r>
+                <a:rPr lang="ja-JP" altLang="en-US" b="1" dirty="0"/>
+                <a:t>座標</a:t>
+              </a:r>
+              <a:endParaRPr lang="en-US" altLang="ja-JP" b="1" dirty="0"/>
+            </a:p>
+            <a:p>
+              <a:pPr algn="ctr"/>
+              <a:r>
+                <a:rPr kumimoji="1" lang="en-US" altLang="ja-JP" b="1" dirty="0"/>
+                <a:t>Z</a:t>
+              </a:r>
+              <a:r>
+                <a:rPr kumimoji="1" lang="ja-JP" altLang="en-US" b="1" dirty="0"/>
+                <a:t>座標</a:t>
+              </a:r>
+            </a:p>
+          </p:txBody>
+        </p:sp>
+        <p:sp>
+          <p:nvSpPr>
+            <p:cNvPr id="9" name="正方形/長方形 8">
+              <a:extLst>
+                <a:ext uri="{FF2B5EF4-FFF2-40B4-BE49-F238E27FC236}">
+                  <a16:creationId xmlns:a16="http://schemas.microsoft.com/office/drawing/2014/main" id="{0C575F63-B744-4812-9441-473FB710B888}"/>
+                </a:ext>
+              </a:extLst>
+            </p:cNvPr>
+            <p:cNvSpPr/>
+            <p:nvPr/>
+          </p:nvSpPr>
+          <p:spPr>
+            <a:xfrm>
+              <a:off x="1363133" y="3623733"/>
+              <a:ext cx="1126067" cy="634999"/>
+            </a:xfrm>
+            <a:prstGeom prst="rect">
+              <a:avLst/>
+            </a:prstGeom>
+          </p:spPr>
+          <p:style>
+            <a:lnRef idx="2">
+              <a:schemeClr val="accent2">
+                <a:shade val="50000"/>
+              </a:schemeClr>
+            </a:lnRef>
+            <a:fillRef idx="1">
+              <a:schemeClr val="accent2"/>
+            </a:fillRef>
+            <a:effectRef idx="0">
+              <a:schemeClr val="accent2"/>
+            </a:effectRef>
+            <a:fontRef idx="minor">
+              <a:schemeClr val="lt1"/>
+            </a:fontRef>
+          </p:style>
+          <p:txBody>
+            <a:bodyPr rtlCol="0" anchor="ctr"/>
+            <a:lstStyle/>
+            <a:p>
+              <a:pPr algn="ctr"/>
+              <a:r>
+                <a:rPr kumimoji="1" lang="ja-JP" altLang="en-US" b="1" dirty="0"/>
+                <a:t>座標だよ</a:t>
+              </a:r>
+            </a:p>
+          </p:txBody>
+        </p:sp>
+        <p:sp>
+          <p:nvSpPr>
+            <p:cNvPr id="5" name="矢印: 右 4">
+              <a:extLst>
+                <a:ext uri="{FF2B5EF4-FFF2-40B4-BE49-F238E27FC236}">
+                  <a16:creationId xmlns:a16="http://schemas.microsoft.com/office/drawing/2014/main" id="{3589965F-3EAA-4826-B023-D24C81179987}"/>
+                </a:ext>
+              </a:extLst>
+            </p:cNvPr>
+            <p:cNvSpPr/>
+            <p:nvPr/>
+          </p:nvSpPr>
+          <p:spPr>
+            <a:xfrm rot="10800000">
+              <a:off x="2563462" y="3539064"/>
+              <a:ext cx="558800" cy="440267"/>
+            </a:xfrm>
+            <a:prstGeom prst="rightArrow">
+              <a:avLst/>
+            </a:prstGeom>
+            <a:solidFill>
+              <a:srgbClr val="FF0000"/>
+            </a:solidFill>
+            <a:ln>
+              <a:solidFill>
+                <a:schemeClr val="tx1"/>
+              </a:solidFill>
+            </a:ln>
+          </p:spPr>
+          <p:style>
+            <a:lnRef idx="2">
+              <a:schemeClr val="accent1">
+                <a:shade val="50000"/>
+              </a:schemeClr>
+            </a:lnRef>
+            <a:fillRef idx="1">
+              <a:schemeClr val="accent1"/>
+            </a:fillRef>
+            <a:effectRef idx="0">
+              <a:schemeClr val="accent1"/>
+            </a:effectRef>
+            <a:fontRef idx="minor">
+              <a:schemeClr val="lt1"/>
+            </a:fontRef>
+          </p:style>
+          <p:txBody>
+            <a:bodyPr rtlCol="0" anchor="ctr"/>
+            <a:lstStyle/>
+            <a:p>
+              <a:pPr algn="ctr"/>
+              <a:endParaRPr kumimoji="1" lang="ja-JP" altLang="en-US"/>
+            </a:p>
+          </p:txBody>
+        </p:sp>
+      </p:grpSp>
+      <p:sp>
+        <p:nvSpPr>
+          <p:cNvPr id="11" name="テキスト ボックス 10">
+            <a:extLst>
+              <a:ext uri="{FF2B5EF4-FFF2-40B4-BE49-F238E27FC236}">
+                <a16:creationId xmlns:a16="http://schemas.microsoft.com/office/drawing/2014/main" id="{E0C6C2BA-6B8D-4065-83D4-CBC9EF16402B}"/>
+              </a:ext>
+            </a:extLst>
+          </p:cNvPr>
+          <p:cNvSpPr txBox="1"/>
+          <p:nvPr/>
+        </p:nvSpPr>
+        <p:spPr>
+          <a:xfrm>
+            <a:off x="3092545" y="5463718"/>
+            <a:ext cx="6340197" cy="830997"/>
+          </a:xfrm>
+          <a:prstGeom prst="rect">
+            <a:avLst/>
+          </a:prstGeom>
+          <a:noFill/>
+        </p:spPr>
+        <p:txBody>
+          <a:bodyPr wrap="none" rtlCol="0">
+            <a:spAutoFit/>
+          </a:bodyPr>
+          <a:lstStyle/>
+          <a:p>
+            <a:r>
+              <a:rPr kumimoji="1" lang="en-US" altLang="ja-JP" sz="2400" b="1" dirty="0">
+                <a:solidFill>
+                  <a:srgbClr val="00B050"/>
+                </a:solidFill>
+              </a:rPr>
+              <a:t>MEMO</a:t>
+            </a:r>
+          </a:p>
+          <a:p>
+            <a:r>
+              <a:rPr lang="ja-JP" altLang="en-US" sz="2400" dirty="0"/>
+              <a:t>データそのもののことをパケットと呼びます</a:t>
+            </a:r>
+            <a:endParaRPr kumimoji="1" lang="en-US" altLang="ja-JP" sz="2400" dirty="0"/>
+          </a:p>
+        </p:txBody>
+      </p:sp>
+    </p:spTree>
+    <p:extLst>
+      <p:ext uri="{BB962C8B-B14F-4D97-AF65-F5344CB8AC3E}">
+        <p14:creationId xmlns:p14="http://schemas.microsoft.com/office/powerpoint/2010/main" val="578403283"/>
+      </p:ext>
+    </p:extLst>
+  </p:cSld>
+  <p:clrMapOvr>
+    <a:masterClrMapping/>
+  </p:clrMapOvr>
+</p:sld>
+</file>
+
+<file path=ppt/slides/slide4.xml><?xml version="1.0" encoding="utf-8"?>
+<p:sld xmlns:a="http://schemas.openxmlformats.org/drawingml/2006/main" xmlns:r="http://schemas.openxmlformats.org/officeDocument/2006/relationships" xmlns:p="http://schemas.openxmlformats.org/presentationml/2006/main">
+  <p:cSld>
+    <p:spTree>
+      <p:nvGrpSpPr>
+        <p:cNvPr id="1" name=""/>
+        <p:cNvGrpSpPr/>
+        <p:nvPr/>
+      </p:nvGrpSpPr>
+      <p:grpSpPr>
+        <a:xfrm>
+          <a:off x="0" y="0"/>
+          <a:ext cx="0" cy="0"/>
+          <a:chOff x="0" y="0"/>
+          <a:chExt cx="0" cy="0"/>
+        </a:xfrm>
+      </p:grpSpPr>
+      <p:sp>
+        <p:nvSpPr>
+          <p:cNvPr id="4" name="テキスト ボックス 3">
+            <a:extLst>
+              <a:ext uri="{FF2B5EF4-FFF2-40B4-BE49-F238E27FC236}">
+                <a16:creationId xmlns:a16="http://schemas.microsoft.com/office/drawing/2014/main" id="{5A13BF46-B8C5-48AA-8308-C9ECFF431A18}"/>
+              </a:ext>
+            </a:extLst>
+          </p:cNvPr>
+          <p:cNvSpPr txBox="1"/>
+          <p:nvPr/>
+        </p:nvSpPr>
+        <p:spPr>
+          <a:xfrm>
+            <a:off x="567542" y="491954"/>
+            <a:ext cx="1826141" cy="584775"/>
+          </a:xfrm>
+          <a:prstGeom prst="rect">
+            <a:avLst/>
+          </a:prstGeom>
+          <a:noFill/>
+        </p:spPr>
+        <p:txBody>
+          <a:bodyPr wrap="none" rtlCol="0">
+            <a:spAutoFit/>
+          </a:bodyPr>
+          <a:lstStyle/>
+          <a:p>
+            <a:r>
+              <a:rPr kumimoji="1" lang="ja-JP" altLang="en-US" sz="3200" b="1" u="sng" dirty="0"/>
+              <a:t>パケット</a:t>
+            </a:r>
+          </a:p>
+        </p:txBody>
+      </p:sp>
+      <p:sp>
+        <p:nvSpPr>
+          <p:cNvPr id="6" name="テキスト ボックス 5">
+            <a:extLst>
+              <a:ext uri="{FF2B5EF4-FFF2-40B4-BE49-F238E27FC236}">
+                <a16:creationId xmlns:a16="http://schemas.microsoft.com/office/drawing/2014/main" id="{55830AD6-028B-4C4E-80BF-B70DFC1C3A46}"/>
+              </a:ext>
+            </a:extLst>
+          </p:cNvPr>
+          <p:cNvSpPr txBox="1"/>
+          <p:nvPr/>
+        </p:nvSpPr>
+        <p:spPr>
+          <a:xfrm>
+            <a:off x="567542" y="1216429"/>
+            <a:ext cx="7611379" cy="830997"/>
+          </a:xfrm>
+          <a:prstGeom prst="rect">
+            <a:avLst/>
+          </a:prstGeom>
+          <a:noFill/>
+        </p:spPr>
+        <p:txBody>
+          <a:bodyPr wrap="none" rtlCol="0">
+            <a:spAutoFit/>
+          </a:bodyPr>
+          <a:lstStyle/>
+          <a:p>
+            <a:r>
+              <a:rPr kumimoji="1" lang="en-US" altLang="ja-JP" sz="2400" b="1" dirty="0">
+                <a:solidFill>
+                  <a:srgbClr val="0070C0"/>
+                </a:solidFill>
+              </a:rPr>
+              <a:t>Client</a:t>
+            </a:r>
+            <a:r>
+              <a:rPr kumimoji="1" lang="en-US" altLang="ja-JP" sz="2400" dirty="0"/>
+              <a:t>, </a:t>
+            </a:r>
+            <a:r>
+              <a:rPr kumimoji="1" lang="en-US" altLang="ja-JP" sz="2400" b="1" dirty="0">
+                <a:solidFill>
+                  <a:srgbClr val="00B050"/>
+                </a:solidFill>
+              </a:rPr>
+              <a:t>Server</a:t>
+            </a:r>
+            <a:r>
+              <a:rPr kumimoji="1" lang="ja-JP" altLang="en-US" sz="2400" dirty="0"/>
+              <a:t>双方の</a:t>
+            </a:r>
+            <a:r>
+              <a:rPr kumimoji="1" lang="en-US" altLang="ja-JP" sz="2400" b="1" dirty="0" err="1">
+                <a:solidFill>
+                  <a:srgbClr val="FF0000"/>
+                </a:solidFill>
+              </a:rPr>
+              <a:t>NetworkCommonParam.h</a:t>
+            </a:r>
+            <a:r>
+              <a:rPr kumimoji="1" lang="ja-JP" altLang="en-US" sz="2400" dirty="0"/>
+              <a:t>に、</a:t>
+            </a:r>
+            <a:endParaRPr kumimoji="1" lang="en-US" altLang="ja-JP" sz="2400" dirty="0"/>
+          </a:p>
+          <a:p>
+            <a:r>
+              <a:rPr kumimoji="1" lang="ja-JP" altLang="en-US" sz="2400" dirty="0"/>
+              <a:t>パケットの種類を定義します。</a:t>
+            </a:r>
+            <a:endParaRPr kumimoji="1" lang="en-US" altLang="ja-JP" sz="2400" dirty="0"/>
+          </a:p>
+        </p:txBody>
+      </p:sp>
+      <p:sp>
+        <p:nvSpPr>
+          <p:cNvPr id="11" name="テキスト ボックス 10">
+            <a:extLst>
+              <a:ext uri="{FF2B5EF4-FFF2-40B4-BE49-F238E27FC236}">
+                <a16:creationId xmlns:a16="http://schemas.microsoft.com/office/drawing/2014/main" id="{FDFF10D2-BF72-4F4E-B1DD-131D7C55F7F7}"/>
+              </a:ext>
+            </a:extLst>
+          </p:cNvPr>
+          <p:cNvSpPr txBox="1"/>
+          <p:nvPr/>
+        </p:nvSpPr>
+        <p:spPr>
+          <a:xfrm>
+            <a:off x="567541" y="4708408"/>
+            <a:ext cx="3877985" cy="461665"/>
+          </a:xfrm>
+          <a:prstGeom prst="rect">
+            <a:avLst/>
+          </a:prstGeom>
+          <a:noFill/>
+        </p:spPr>
+        <p:txBody>
+          <a:bodyPr wrap="none" rtlCol="0">
+            <a:spAutoFit/>
+          </a:bodyPr>
+          <a:lstStyle/>
+          <a:p>
+            <a:r>
+              <a:rPr kumimoji="1" lang="en-US" altLang="ja-JP" sz="2400" dirty="0"/>
+              <a:t>※</a:t>
+            </a:r>
+            <a:r>
+              <a:rPr kumimoji="1" lang="ja-JP" altLang="en-US" sz="2400" dirty="0"/>
+              <a:t>今後も増やしていきます</a:t>
+            </a:r>
+            <a:endParaRPr kumimoji="1" lang="en-US" altLang="ja-JP" sz="2400" dirty="0"/>
+          </a:p>
+        </p:txBody>
+      </p:sp>
+      <p:pic>
+        <p:nvPicPr>
+          <p:cNvPr id="14" name="図 13">
+            <a:extLst>
+              <a:ext uri="{FF2B5EF4-FFF2-40B4-BE49-F238E27FC236}">
+                <a16:creationId xmlns:a16="http://schemas.microsoft.com/office/drawing/2014/main" id="{5B56207B-13B2-4CEE-9A22-A458DD0ED2EF}"/>
+              </a:ext>
+            </a:extLst>
+          </p:cNvPr>
+          <p:cNvPicPr>
+            <a:picLocks noChangeAspect="1"/>
+          </p:cNvPicPr>
+          <p:nvPr/>
+        </p:nvPicPr>
+        <p:blipFill>
+          <a:blip r:embed="rId2"/>
+          <a:stretch>
+            <a:fillRect/>
+          </a:stretch>
+        </p:blipFill>
+        <p:spPr>
+          <a:xfrm>
+            <a:off x="567541" y="2187126"/>
+            <a:ext cx="6494134" cy="2376165"/>
+          </a:xfrm>
+          <a:prstGeom prst="rect">
+            <a:avLst/>
+          </a:prstGeom>
+        </p:spPr>
+      </p:pic>
+    </p:spTree>
+    <p:extLst>
+      <p:ext uri="{BB962C8B-B14F-4D97-AF65-F5344CB8AC3E}">
+        <p14:creationId xmlns:p14="http://schemas.microsoft.com/office/powerpoint/2010/main" val="1825574956"/>
+      </p:ext>
+    </p:extLst>
+  </p:cSld>
+  <p:clrMapOvr>
+    <a:masterClrMapping/>
+  </p:clrMapOvr>
+</p:sld>
+</file>
+
+<file path=ppt/slides/slide5.xml><?xml version="1.0" encoding="utf-8"?>
+<p:sld xmlns:a="http://schemas.openxmlformats.org/drawingml/2006/main" xmlns:r="http://schemas.openxmlformats.org/officeDocument/2006/relationships" xmlns:p="http://schemas.openxmlformats.org/presentationml/2006/main">
+  <p:cSld>
+    <p:spTree>
+      <p:nvGrpSpPr>
+        <p:cNvPr id="1" name=""/>
+        <p:cNvGrpSpPr/>
+        <p:nvPr/>
+      </p:nvGrpSpPr>
+      <p:grpSpPr>
+        <a:xfrm>
+          <a:off x="0" y="0"/>
+          <a:ext cx="0" cy="0"/>
+          <a:chOff x="0" y="0"/>
+          <a:chExt cx="0" cy="0"/>
+        </a:xfrm>
+      </p:grpSpPr>
+      <p:sp>
+        <p:nvSpPr>
+          <p:cNvPr id="4" name="テキスト ボックス 3">
+            <a:extLst>
+              <a:ext uri="{FF2B5EF4-FFF2-40B4-BE49-F238E27FC236}">
+                <a16:creationId xmlns:a16="http://schemas.microsoft.com/office/drawing/2014/main" id="{5A13BF46-B8C5-48AA-8308-C9ECFF431A18}"/>
+              </a:ext>
+            </a:extLst>
+          </p:cNvPr>
+          <p:cNvSpPr txBox="1"/>
+          <p:nvPr/>
+        </p:nvSpPr>
+        <p:spPr>
+          <a:xfrm>
+            <a:off x="567542" y="491954"/>
+            <a:ext cx="1826141" cy="584775"/>
+          </a:xfrm>
+          <a:prstGeom prst="rect">
+            <a:avLst/>
+          </a:prstGeom>
+          <a:noFill/>
+        </p:spPr>
+        <p:txBody>
+          <a:bodyPr wrap="none" rtlCol="0">
+            <a:spAutoFit/>
+          </a:bodyPr>
+          <a:lstStyle/>
+          <a:p>
+            <a:r>
+              <a:rPr kumimoji="1" lang="ja-JP" altLang="en-US" sz="3200" b="1" u="sng" dirty="0"/>
+              <a:t>パケット</a:t>
+            </a:r>
+          </a:p>
+        </p:txBody>
+      </p:sp>
+      <p:sp>
+        <p:nvSpPr>
+          <p:cNvPr id="6" name="テキスト ボックス 5">
+            <a:extLst>
+              <a:ext uri="{FF2B5EF4-FFF2-40B4-BE49-F238E27FC236}">
+                <a16:creationId xmlns:a16="http://schemas.microsoft.com/office/drawing/2014/main" id="{55830AD6-028B-4C4E-80BF-B70DFC1C3A46}"/>
+              </a:ext>
+            </a:extLst>
+          </p:cNvPr>
+          <p:cNvSpPr txBox="1"/>
+          <p:nvPr/>
+        </p:nvSpPr>
+        <p:spPr>
+          <a:xfrm>
+            <a:off x="567542" y="1216429"/>
+            <a:ext cx="7263527" cy="830997"/>
+          </a:xfrm>
+          <a:prstGeom prst="rect">
+            <a:avLst/>
+          </a:prstGeom>
+          <a:noFill/>
+        </p:spPr>
+        <p:txBody>
+          <a:bodyPr wrap="none" rtlCol="0">
+            <a:spAutoFit/>
+          </a:bodyPr>
+          <a:lstStyle/>
+          <a:p>
+            <a:r>
+              <a:rPr kumimoji="1" lang="ja-JP" altLang="en-US" sz="2400" dirty="0"/>
+              <a:t>通信用の構造体も合わせて用意します。</a:t>
+            </a:r>
+            <a:endParaRPr kumimoji="1" lang="en-US" altLang="ja-JP" sz="2400" dirty="0"/>
+          </a:p>
+          <a:p>
+            <a:r>
+              <a:rPr lang="ja-JP" altLang="en-US" sz="2400" dirty="0"/>
+              <a:t>今後のために、データサイズも用意しておきます。</a:t>
+            </a:r>
+            <a:endParaRPr kumimoji="1" lang="en-US" altLang="ja-JP" sz="2400" dirty="0"/>
+          </a:p>
+        </p:txBody>
+      </p:sp>
+      <p:pic>
+        <p:nvPicPr>
+          <p:cNvPr id="8" name="図 7">
+            <a:extLst>
+              <a:ext uri="{FF2B5EF4-FFF2-40B4-BE49-F238E27FC236}">
+                <a16:creationId xmlns:a16="http://schemas.microsoft.com/office/drawing/2014/main" id="{CE209061-9D77-4D1E-B17A-7121C448BBAD}"/>
+              </a:ext>
+            </a:extLst>
+          </p:cNvPr>
+          <p:cNvPicPr>
+            <a:picLocks noChangeAspect="1"/>
+          </p:cNvPicPr>
+          <p:nvPr/>
+        </p:nvPicPr>
+        <p:blipFill>
+          <a:blip r:embed="rId2"/>
+          <a:stretch>
+            <a:fillRect/>
+          </a:stretch>
+        </p:blipFill>
+        <p:spPr>
+          <a:xfrm>
+            <a:off x="567542" y="2187125"/>
+            <a:ext cx="7836916" cy="4100463"/>
+          </a:xfrm>
+          <a:prstGeom prst="rect">
+            <a:avLst/>
+          </a:prstGeom>
+        </p:spPr>
+      </p:pic>
+      <p:sp>
+        <p:nvSpPr>
+          <p:cNvPr id="9" name="正方形/長方形 8">
+            <a:extLst>
+              <a:ext uri="{FF2B5EF4-FFF2-40B4-BE49-F238E27FC236}">
+                <a16:creationId xmlns:a16="http://schemas.microsoft.com/office/drawing/2014/main" id="{5B049FE3-FF83-441D-A3F1-72173E18B558}"/>
+              </a:ext>
+            </a:extLst>
+          </p:cNvPr>
+          <p:cNvSpPr/>
+          <p:nvPr/>
+        </p:nvSpPr>
+        <p:spPr>
+          <a:xfrm>
+            <a:off x="2246812" y="4544291"/>
+            <a:ext cx="6157646" cy="1595252"/>
+          </a:xfrm>
+          <a:prstGeom prst="rect">
+            <a:avLst/>
+          </a:prstGeom>
+          <a:noFill/>
+          <a:ln w="38100">
+            <a:solidFill>
+              <a:srgbClr val="FF0000"/>
+            </a:solidFill>
+          </a:ln>
+        </p:spPr>
+        <p:style>
+          <a:lnRef idx="2">
+            <a:schemeClr val="accent1">
+              <a:shade val="50000"/>
+            </a:schemeClr>
+          </a:lnRef>
+          <a:fillRef idx="1">
+            <a:schemeClr val="accent1"/>
+          </a:fillRef>
+          <a:effectRef idx="0">
+            <a:schemeClr val="accent1"/>
+          </a:effectRef>
+          <a:fontRef idx="minor">
+            <a:schemeClr val="lt1"/>
+          </a:fontRef>
+        </p:style>
+        <p:txBody>
+          <a:bodyPr rtlCol="0" anchor="ctr"/>
+          <a:lstStyle/>
+          <a:p>
+            <a:pPr algn="ctr"/>
+            <a:endParaRPr kumimoji="1" lang="ja-JP" altLang="en-US"/>
+          </a:p>
+        </p:txBody>
+      </p:sp>
+    </p:spTree>
+    <p:extLst>
+      <p:ext uri="{BB962C8B-B14F-4D97-AF65-F5344CB8AC3E}">
+        <p14:creationId xmlns:p14="http://schemas.microsoft.com/office/powerpoint/2010/main" val="4070058608"/>
+      </p:ext>
+    </p:extLst>
+  </p:cSld>
+  <p:clrMapOvr>
+    <a:masterClrMapping/>
+  </p:clrMapOvr>
+</p:sld>
+</file>
+
 <file path=ppt/theme/theme1.xml><?xml version="1.0" encoding="utf-8"?>
 <a:theme xmlns:a="http://schemas.openxmlformats.org/drawingml/2006/main" name="Office テーマ">
   <a:themeElements>

--- a/ゲーム科3年/00_前期/オンラインゲームプログラミングⅠ/07_パケット.pptx
+++ b/ゲーム科3年/00_前期/オンラインゲームプログラミングⅠ/07_パケット.pptx
@@ -10,6 +10,7 @@
     <p:sldId id="258" r:id="rId4"/>
     <p:sldId id="259" r:id="rId5"/>
     <p:sldId id="260" r:id="rId6"/>
+    <p:sldId id="261" r:id="rId7"/>
   </p:sldIdLst>
   <p:sldSz cx="12192000" cy="6858000"/>
   <p:notesSz cx="6858000" cy="9144000"/>
@@ -263,7 +264,7 @@
           <a:p>
             <a:fld id="{E9CC885B-4903-4D54-9A93-00025F12DED9}" type="datetimeFigureOut">
               <a:rPr kumimoji="1" lang="ja-JP" altLang="en-US" smtClean="0"/>
-              <a:t>2025/10/30</a:t>
+              <a:t>2025/11/6</a:t>
             </a:fld>
             <a:endParaRPr kumimoji="1" lang="ja-JP" altLang="en-US"/>
           </a:p>
@@ -493,7 +494,7 @@
           <a:p>
             <a:fld id="{E9CC885B-4903-4D54-9A93-00025F12DED9}" type="datetimeFigureOut">
               <a:rPr kumimoji="1" lang="ja-JP" altLang="en-US" smtClean="0"/>
-              <a:t>2025/10/30</a:t>
+              <a:t>2025/11/6</a:t>
             </a:fld>
             <a:endParaRPr kumimoji="1" lang="ja-JP" altLang="en-US"/>
           </a:p>
@@ -733,7 +734,7 @@
           <a:p>
             <a:fld id="{E9CC885B-4903-4D54-9A93-00025F12DED9}" type="datetimeFigureOut">
               <a:rPr kumimoji="1" lang="ja-JP" altLang="en-US" smtClean="0"/>
-              <a:t>2025/10/30</a:t>
+              <a:t>2025/11/6</a:t>
             </a:fld>
             <a:endParaRPr kumimoji="1" lang="ja-JP" altLang="en-US"/>
           </a:p>
@@ -963,7 +964,7 @@
           <a:p>
             <a:fld id="{E9CC885B-4903-4D54-9A93-00025F12DED9}" type="datetimeFigureOut">
               <a:rPr kumimoji="1" lang="ja-JP" altLang="en-US" smtClean="0"/>
-              <a:t>2025/10/30</a:t>
+              <a:t>2025/11/6</a:t>
             </a:fld>
             <a:endParaRPr kumimoji="1" lang="ja-JP" altLang="en-US"/>
           </a:p>
@@ -1238,7 +1239,7 @@
           <a:p>
             <a:fld id="{E9CC885B-4903-4D54-9A93-00025F12DED9}" type="datetimeFigureOut">
               <a:rPr kumimoji="1" lang="ja-JP" altLang="en-US" smtClean="0"/>
-              <a:t>2025/10/30</a:t>
+              <a:t>2025/11/6</a:t>
             </a:fld>
             <a:endParaRPr kumimoji="1" lang="ja-JP" altLang="en-US"/>
           </a:p>
@@ -1567,7 +1568,7 @@
           <a:p>
             <a:fld id="{E9CC885B-4903-4D54-9A93-00025F12DED9}" type="datetimeFigureOut">
               <a:rPr kumimoji="1" lang="ja-JP" altLang="en-US" smtClean="0"/>
-              <a:t>2025/10/30</a:t>
+              <a:t>2025/11/6</a:t>
             </a:fld>
             <a:endParaRPr kumimoji="1" lang="ja-JP" altLang="en-US"/>
           </a:p>
@@ -2043,7 +2044,7 @@
           <a:p>
             <a:fld id="{E9CC885B-4903-4D54-9A93-00025F12DED9}" type="datetimeFigureOut">
               <a:rPr kumimoji="1" lang="ja-JP" altLang="en-US" smtClean="0"/>
-              <a:t>2025/10/30</a:t>
+              <a:t>2025/11/6</a:t>
             </a:fld>
             <a:endParaRPr kumimoji="1" lang="ja-JP" altLang="en-US"/>
           </a:p>
@@ -2184,7 +2185,7 @@
           <a:p>
             <a:fld id="{E9CC885B-4903-4D54-9A93-00025F12DED9}" type="datetimeFigureOut">
               <a:rPr kumimoji="1" lang="ja-JP" altLang="en-US" smtClean="0"/>
-              <a:t>2025/10/30</a:t>
+              <a:t>2025/11/6</a:t>
             </a:fld>
             <a:endParaRPr kumimoji="1" lang="ja-JP" altLang="en-US"/>
           </a:p>
@@ -2297,7 +2298,7 @@
           <a:p>
             <a:fld id="{E9CC885B-4903-4D54-9A93-00025F12DED9}" type="datetimeFigureOut">
               <a:rPr kumimoji="1" lang="ja-JP" altLang="en-US" smtClean="0"/>
-              <a:t>2025/10/30</a:t>
+              <a:t>2025/11/6</a:t>
             </a:fld>
             <a:endParaRPr kumimoji="1" lang="ja-JP" altLang="en-US"/>
           </a:p>
@@ -2640,7 +2641,7 @@
           <a:p>
             <a:fld id="{E9CC885B-4903-4D54-9A93-00025F12DED9}" type="datetimeFigureOut">
               <a:rPr kumimoji="1" lang="ja-JP" altLang="en-US" smtClean="0"/>
-              <a:t>2025/10/30</a:t>
+              <a:t>2025/11/6</a:t>
             </a:fld>
             <a:endParaRPr kumimoji="1" lang="ja-JP" altLang="en-US"/>
           </a:p>
@@ -2928,7 +2929,7 @@
           <a:p>
             <a:fld id="{E9CC885B-4903-4D54-9A93-00025F12DED9}" type="datetimeFigureOut">
               <a:rPr kumimoji="1" lang="ja-JP" altLang="en-US" smtClean="0"/>
-              <a:t>2025/10/30</a:t>
+              <a:t>2025/11/6</a:t>
             </a:fld>
             <a:endParaRPr kumimoji="1" lang="ja-JP" altLang="en-US"/>
           </a:p>
@@ -3201,7 +3202,7 @@
           <a:p>
             <a:fld id="{E9CC885B-4903-4D54-9A93-00025F12DED9}" type="datetimeFigureOut">
               <a:rPr kumimoji="1" lang="ja-JP" altLang="en-US" smtClean="0"/>
-              <a:t>2025/10/30</a:t>
+              <a:t>2025/11/6</a:t>
             </a:fld>
             <a:endParaRPr kumimoji="1" lang="ja-JP" altLang="en-US"/>
           </a:p>
@@ -4772,6 +4773,197 @@
 </p:sld>
 </file>
 
+<file path=ppt/slides/slide6.xml><?xml version="1.0" encoding="utf-8"?>
+<p:sld xmlns:a="http://schemas.openxmlformats.org/drawingml/2006/main" xmlns:r="http://schemas.openxmlformats.org/officeDocument/2006/relationships" xmlns:p="http://schemas.openxmlformats.org/presentationml/2006/main">
+  <p:cSld>
+    <p:spTree>
+      <p:nvGrpSpPr>
+        <p:cNvPr id="1" name=""/>
+        <p:cNvGrpSpPr/>
+        <p:nvPr/>
+      </p:nvGrpSpPr>
+      <p:grpSpPr>
+        <a:xfrm>
+          <a:off x="0" y="0"/>
+          <a:ext cx="0" cy="0"/>
+          <a:chOff x="0" y="0"/>
+          <a:chExt cx="0" cy="0"/>
+        </a:xfrm>
+      </p:grpSpPr>
+      <p:sp>
+        <p:nvSpPr>
+          <p:cNvPr id="4" name="テキスト ボックス 3">
+            <a:extLst>
+              <a:ext uri="{FF2B5EF4-FFF2-40B4-BE49-F238E27FC236}">
+                <a16:creationId xmlns:a16="http://schemas.microsoft.com/office/drawing/2014/main" id="{5A13BF46-B8C5-48AA-8308-C9ECFF431A18}"/>
+              </a:ext>
+            </a:extLst>
+          </p:cNvPr>
+          <p:cNvSpPr txBox="1"/>
+          <p:nvPr/>
+        </p:nvSpPr>
+        <p:spPr>
+          <a:xfrm>
+            <a:off x="567542" y="491954"/>
+            <a:ext cx="1826141" cy="584775"/>
+          </a:xfrm>
+          <a:prstGeom prst="rect">
+            <a:avLst/>
+          </a:prstGeom>
+          <a:noFill/>
+        </p:spPr>
+        <p:txBody>
+          <a:bodyPr wrap="none" rtlCol="0">
+            <a:spAutoFit/>
+          </a:bodyPr>
+          <a:lstStyle/>
+          <a:p>
+            <a:r>
+              <a:rPr kumimoji="1" lang="ja-JP" altLang="en-US" sz="3200" b="1" u="sng" dirty="0"/>
+              <a:t>パケット</a:t>
+            </a:r>
+          </a:p>
+        </p:txBody>
+      </p:sp>
+      <p:sp>
+        <p:nvSpPr>
+          <p:cNvPr id="6" name="テキスト ボックス 5">
+            <a:extLst>
+              <a:ext uri="{FF2B5EF4-FFF2-40B4-BE49-F238E27FC236}">
+                <a16:creationId xmlns:a16="http://schemas.microsoft.com/office/drawing/2014/main" id="{55830AD6-028B-4C4E-80BF-B70DFC1C3A46}"/>
+              </a:ext>
+            </a:extLst>
+          </p:cNvPr>
+          <p:cNvSpPr txBox="1"/>
+          <p:nvPr/>
+        </p:nvSpPr>
+        <p:spPr>
+          <a:xfrm>
+            <a:off x="567542" y="1216429"/>
+            <a:ext cx="8494633" cy="4154984"/>
+          </a:xfrm>
+          <a:prstGeom prst="rect">
+            <a:avLst/>
+          </a:prstGeom>
+          <a:noFill/>
+        </p:spPr>
+        <p:txBody>
+          <a:bodyPr wrap="none" rtlCol="0">
+            <a:spAutoFit/>
+          </a:bodyPr>
+          <a:lstStyle/>
+          <a:p>
+            <a:r>
+              <a:rPr kumimoji="1" lang="ja-JP" altLang="en-US" sz="2400" dirty="0"/>
+              <a:t>次のスライドから、ネットワーク要素を実装していきます。</a:t>
+            </a:r>
+            <a:endParaRPr kumimoji="1" lang="en-US" altLang="ja-JP" sz="2400" dirty="0"/>
+          </a:p>
+          <a:p>
+            <a:endParaRPr lang="en-US" altLang="ja-JP" sz="2400" dirty="0"/>
+          </a:p>
+          <a:p>
+            <a:r>
+              <a:rPr lang="ja-JP" altLang="en-US" sz="2400" dirty="0"/>
+              <a:t>ネットワーク用に機能拡張したクラスを作り、</a:t>
+            </a:r>
+            <a:endParaRPr lang="en-US" altLang="ja-JP" sz="2400" dirty="0"/>
+          </a:p>
+          <a:p>
+            <a:r>
+              <a:rPr lang="ja-JP" altLang="en-US" sz="2400" b="1" dirty="0">
+                <a:solidFill>
+                  <a:srgbClr val="FF0000"/>
+                </a:solidFill>
+              </a:rPr>
+              <a:t>・ログイン</a:t>
+            </a:r>
+            <a:endParaRPr lang="en-US" altLang="ja-JP" sz="2400" b="1" dirty="0">
+              <a:solidFill>
+                <a:srgbClr val="FF0000"/>
+              </a:solidFill>
+            </a:endParaRPr>
+          </a:p>
+          <a:p>
+            <a:r>
+              <a:rPr lang="ja-JP" altLang="en-US" sz="2400" b="1" dirty="0">
+                <a:solidFill>
+                  <a:srgbClr val="FF0000"/>
+                </a:solidFill>
+              </a:rPr>
+              <a:t>・ジョイン（途中参加）</a:t>
+            </a:r>
+            <a:endParaRPr lang="en-US" altLang="ja-JP" sz="2400" b="1" dirty="0">
+              <a:solidFill>
+                <a:srgbClr val="FF0000"/>
+              </a:solidFill>
+            </a:endParaRPr>
+          </a:p>
+          <a:p>
+            <a:r>
+              <a:rPr lang="ja-JP" altLang="en-US" sz="2400" b="1" dirty="0">
+                <a:solidFill>
+                  <a:srgbClr val="FF0000"/>
+                </a:solidFill>
+              </a:rPr>
+              <a:t>・ログアウト</a:t>
+            </a:r>
+            <a:endParaRPr lang="en-US" altLang="ja-JP" sz="2400" b="1" dirty="0">
+              <a:solidFill>
+                <a:srgbClr val="FF0000"/>
+              </a:solidFill>
+            </a:endParaRPr>
+          </a:p>
+          <a:p>
+            <a:endParaRPr lang="en-US" altLang="ja-JP" sz="2400" dirty="0"/>
+          </a:p>
+          <a:p>
+            <a:r>
+              <a:rPr lang="ja-JP" altLang="en-US" sz="2400" dirty="0"/>
+              <a:t>この３つから実装していきます。</a:t>
+            </a:r>
+            <a:endParaRPr lang="en-US" altLang="ja-JP" sz="2400" dirty="0"/>
+          </a:p>
+          <a:p>
+            <a:endParaRPr lang="en-US" altLang="ja-JP" sz="2400" dirty="0"/>
+          </a:p>
+          <a:p>
+            <a:r>
+              <a:rPr lang="ja-JP" altLang="en-US" sz="2400" dirty="0"/>
+              <a:t>また、クライアントをクラス化しています。</a:t>
+            </a:r>
+            <a:endParaRPr lang="en-US" altLang="ja-JP" sz="2400" dirty="0"/>
+          </a:p>
+          <a:p>
+            <a:r>
+              <a:rPr lang="en-US" altLang="ja-JP" sz="2400" b="1" dirty="0">
+                <a:solidFill>
+                  <a:srgbClr val="FF0000"/>
+                </a:solidFill>
+              </a:rPr>
+              <a:t>Client.cpp/.h</a:t>
+            </a:r>
+            <a:r>
+              <a:rPr lang="ja-JP" altLang="en-US" sz="2400" dirty="0"/>
+              <a:t>は一度確認しておきましょう。</a:t>
+            </a:r>
+            <a:endParaRPr lang="en-US" altLang="ja-JP" sz="2400" dirty="0"/>
+          </a:p>
+        </p:txBody>
+      </p:sp>
+    </p:spTree>
+    <p:extLst>
+      <p:ext uri="{BB962C8B-B14F-4D97-AF65-F5344CB8AC3E}">
+        <p14:creationId xmlns:p14="http://schemas.microsoft.com/office/powerpoint/2010/main" val="1702505349"/>
+      </p:ext>
+    </p:extLst>
+  </p:cSld>
+  <p:clrMapOvr>
+    <a:masterClrMapping/>
+  </p:clrMapOvr>
+</p:sld>
+</file>
+
 <file path=ppt/theme/theme1.xml><?xml version="1.0" encoding="utf-8"?>
 <a:theme xmlns:a="http://schemas.openxmlformats.org/drawingml/2006/main" name="Office テーマ">
   <a:themeElements>
